--- a/prezentacie/p09w.pptx
+++ b/prezentacie/p09w.pptx
@@ -6004,7 +6004,7 @@
             </a:pPr>
             <a:r>
               <a:rPr lang="sk-SK" dirty="0"/>
-              <a:t>Funkcie definované v triede, ktoré nemajú žiaden prístup ani k objektu ani ku triede.</a:t>
+              <a:t>Funkcie definované v triede, ktoré nemajú žiadny prístup ani k objektu ani ku triede.</a:t>
             </a:r>
           </a:p>
           <a:p>
